--- a/lectures/week-05/lecture-zh.pptx
+++ b/lectures/week-05/lecture-zh.pptx
@@ -15460,7 +15460,7 @@
                 </a:solidFill>
                 <a:latin typeface="Source Han Sans SC"/>
               </a:rPr>
-              <a:t>理论约 90 min · Lab 约 75 min · 小测与小结 15 min</a:t>
+              <a:t>理论约 90 min · Lab 80 min · 小测与小结 10 min</a:t>
             </a:r>
           </a:p>
         </p:txBody>
@@ -17255,7 +17255,7 @@
                 </a:solidFill>
                 <a:latin typeface="Source Han Sans SC"/>
               </a:rPr>
-              <a:t>75 分钟，亲手做一次真正的对照实验：3 种优化器 × 3 组学习率 = 9 次运行，
+              <a:t>80 分钟，亲手做一次真正的对照实验：3 种优化器 × 3 组学习率 = 9 次运行，
 然后回答一个必须用数据支撑的问题——哪一个组合最好，为什么。</a:t>
             </a:r>
           </a:p>
